--- a/data-eng/decks/w3d5s1.pptx
+++ b/data-eng/decks/w3d5s1.pptx
@@ -3100,7 +3100,7 @@
       <p:grpSpPr/>
       <p:sp>
         <p:nvSpPr>
-          <p:cNvPr id="2" name="Oval 1"/>
+          <p:cNvPr id="2" name="deckgen:decor"/>
           <p:cNvSpPr/>
           <p:nvPr/>
         </p:nvSpPr>
@@ -3130,7 +3130,7 @@
       </p:sp>
       <p:sp>
         <p:nvSpPr>
-          <p:cNvPr id="3" name="Oval 2"/>
+          <p:cNvPr id="3" name="deckgen:decor"/>
           <p:cNvSpPr/>
           <p:nvPr/>
         </p:nvSpPr>
@@ -3160,7 +3160,7 @@
       </p:sp>
       <p:sp>
         <p:nvSpPr>
-          <p:cNvPr id="4" name="Oval 3"/>
+          <p:cNvPr id="4" name="deckgen:decor"/>
           <p:cNvSpPr/>
           <p:nvPr/>
         </p:nvSpPr>
@@ -3190,7 +3190,7 @@
       </p:sp>
       <p:sp>
         <p:nvSpPr>
-          <p:cNvPr id="5" name="Rectangle 4"/>
+          <p:cNvPr id="5" name="deckgen:decor"/>
           <p:cNvSpPr/>
           <p:nvPr/>
         </p:nvSpPr>
@@ -3220,7 +3220,7 @@
       </p:sp>
       <p:sp>
         <p:nvSpPr>
-          <p:cNvPr id="6" name="Oval 5"/>
+          <p:cNvPr id="6" name="deckgen:decor"/>
           <p:cNvSpPr/>
           <p:nvPr/>
         </p:nvSpPr>
@@ -3250,7 +3250,7 @@
       </p:sp>
       <p:sp>
         <p:nvSpPr>
-          <p:cNvPr id="7" name="Oval 6"/>
+          <p:cNvPr id="7" name="deckgen:decor"/>
           <p:cNvSpPr/>
           <p:nvPr/>
         </p:nvSpPr>
@@ -3280,7 +3280,7 @@
       </p:sp>
       <p:sp>
         <p:nvSpPr>
-          <p:cNvPr id="8" name="Oval 7"/>
+          <p:cNvPr id="8" name="deckgen:decor"/>
           <p:cNvSpPr/>
           <p:nvPr/>
         </p:nvSpPr>
@@ -3310,7 +3310,7 @@
       </p:sp>
       <p:sp>
         <p:nvSpPr>
-          <p:cNvPr id="9" name="Oval 8"/>
+          <p:cNvPr id="9" name="deckgen:decor"/>
           <p:cNvSpPr/>
           <p:nvPr/>
         </p:nvSpPr>
@@ -3340,7 +3340,7 @@
       </p:sp>
       <p:sp>
         <p:nvSpPr>
-          <p:cNvPr id="10" name="Rectangle 9"/>
+          <p:cNvPr id="10" name="deckgen:decor"/>
           <p:cNvSpPr/>
           <p:nvPr/>
         </p:nvSpPr>
@@ -3600,7 +3600,7 @@
       <p:grpSpPr/>
       <p:sp>
         <p:nvSpPr>
-          <p:cNvPr id="2" name="Oval 1"/>
+          <p:cNvPr id="2" name="deckgen:decor"/>
           <p:cNvSpPr/>
           <p:nvPr/>
         </p:nvSpPr>
@@ -3630,7 +3630,7 @@
       </p:sp>
       <p:sp>
         <p:nvSpPr>
-          <p:cNvPr id="3" name="Oval 2"/>
+          <p:cNvPr id="3" name="deckgen:decor"/>
           <p:cNvSpPr/>
           <p:nvPr/>
         </p:nvSpPr>
@@ -3660,7 +3660,7 @@
       </p:sp>
       <p:sp>
         <p:nvSpPr>
-          <p:cNvPr id="4" name="Oval 3"/>
+          <p:cNvPr id="4" name="deckgen:decor"/>
           <p:cNvSpPr/>
           <p:nvPr/>
         </p:nvSpPr>
@@ -4662,7 +4662,7 @@
       <p:grpSpPr/>
       <p:sp>
         <p:nvSpPr>
-          <p:cNvPr id="2" name="Oval 1"/>
+          <p:cNvPr id="2" name="deckgen:decor"/>
           <p:cNvSpPr/>
           <p:nvPr/>
         </p:nvSpPr>
@@ -4692,7 +4692,7 @@
       </p:sp>
       <p:sp>
         <p:nvSpPr>
-          <p:cNvPr id="3" name="Oval 2"/>
+          <p:cNvPr id="3" name="deckgen:decor"/>
           <p:cNvSpPr/>
           <p:nvPr/>
         </p:nvSpPr>
@@ -5092,7 +5092,7 @@
               </a:lnSpc>
             </a:pPr>
             <a:r>
-              <a:rPr sz="2250" b="1">
+              <a:rPr sz="2475" b="1">
                 <a:solidFill>
                   <a:srgbClr val="0D2B5E"/>
                 </a:solidFill>
@@ -5100,7 +5100,7 @@
                 <a:ea typeface="Pretendard"/>
                 <a:cs typeface="Pretendard"/>
               </a:rPr>
-              <a:t>clean_orders.py — 추출은 DuckDB, 정제는 Pandas</a:t>
+              <a:t>clean_orders.py 로 정제</a:t>
             </a:r>
           </a:p>
         </p:txBody>
@@ -5469,7 +5469,7 @@
       <p:grpSpPr/>
       <p:sp>
         <p:nvSpPr>
-          <p:cNvPr id="2" name="Oval 1"/>
+          <p:cNvPr id="2" name="deckgen:decor"/>
           <p:cNvSpPr/>
           <p:nvPr/>
         </p:nvSpPr>
@@ -5499,7 +5499,7 @@
       </p:sp>
       <p:sp>
         <p:nvSpPr>
-          <p:cNvPr id="3" name="Oval 2"/>
+          <p:cNvPr id="3" name="deckgen:decor"/>
           <p:cNvSpPr/>
           <p:nvPr/>
         </p:nvSpPr>
@@ -5529,7 +5529,7 @@
       </p:sp>
       <p:sp>
         <p:nvSpPr>
-          <p:cNvPr id="4" name="Oval 3"/>
+          <p:cNvPr id="4" name="deckgen:decor"/>
           <p:cNvSpPr/>
           <p:nvPr/>
         </p:nvSpPr>
@@ -6460,7 +6460,7 @@
       <p:grpSpPr/>
       <p:sp>
         <p:nvSpPr>
-          <p:cNvPr id="2" name="Oval 1"/>
+          <p:cNvPr id="2" name="deckgen:decor"/>
           <p:cNvSpPr/>
           <p:nvPr/>
         </p:nvSpPr>
@@ -6490,7 +6490,7 @@
       </p:sp>
       <p:sp>
         <p:nvSpPr>
-          <p:cNvPr id="3" name="Oval 2"/>
+          <p:cNvPr id="3" name="deckgen:decor"/>
           <p:cNvSpPr/>
           <p:nvPr/>
         </p:nvSpPr>
@@ -6520,7 +6520,7 @@
       </p:sp>
       <p:sp>
         <p:nvSpPr>
-          <p:cNvPr id="4" name="Oval 3"/>
+          <p:cNvPr id="4" name="deckgen:decor"/>
           <p:cNvSpPr/>
           <p:nvPr/>
         </p:nvSpPr>
@@ -7848,7 +7848,7 @@
       <p:grpSpPr/>
       <p:sp>
         <p:nvSpPr>
-          <p:cNvPr id="2" name="Oval 1"/>
+          <p:cNvPr id="2" name="deckgen:decor"/>
           <p:cNvSpPr/>
           <p:nvPr/>
         </p:nvSpPr>
@@ -7878,7 +7878,7 @@
       </p:sp>
       <p:sp>
         <p:nvSpPr>
-          <p:cNvPr id="3" name="Oval 2"/>
+          <p:cNvPr id="3" name="deckgen:decor"/>
           <p:cNvSpPr/>
           <p:nvPr/>
         </p:nvSpPr>
@@ -7908,7 +7908,7 @@
       </p:sp>
       <p:sp>
         <p:nvSpPr>
-          <p:cNvPr id="4" name="Oval 3"/>
+          <p:cNvPr id="4" name="deckgen:decor"/>
           <p:cNvSpPr/>
           <p:nvPr/>
         </p:nvSpPr>
@@ -8909,7 +8909,7 @@
       <p:grpSpPr/>
       <p:sp>
         <p:nvSpPr>
-          <p:cNvPr id="2" name="Oval 1"/>
+          <p:cNvPr id="2" name="deckgen:decor"/>
           <p:cNvSpPr/>
           <p:nvPr/>
         </p:nvSpPr>
@@ -8939,7 +8939,7 @@
       </p:sp>
       <p:sp>
         <p:nvSpPr>
-          <p:cNvPr id="3" name="Oval 2"/>
+          <p:cNvPr id="3" name="deckgen:decor"/>
           <p:cNvSpPr/>
           <p:nvPr/>
         </p:nvSpPr>
@@ -8969,7 +8969,7 @@
       </p:sp>
       <p:sp>
         <p:nvSpPr>
-          <p:cNvPr id="4" name="Oval 3"/>
+          <p:cNvPr id="4" name="deckgen:decor"/>
           <p:cNvSpPr/>
           <p:nvPr/>
         </p:nvSpPr>
@@ -10845,7 +10845,7 @@
       <p:grpSpPr/>
       <p:sp>
         <p:nvSpPr>
-          <p:cNvPr id="2" name="Oval 1"/>
+          <p:cNvPr id="2" name="deckgen:decor"/>
           <p:cNvSpPr/>
           <p:nvPr/>
         </p:nvSpPr>
@@ -10875,7 +10875,7 @@
       </p:sp>
       <p:sp>
         <p:nvSpPr>
-          <p:cNvPr id="3" name="Oval 2"/>
+          <p:cNvPr id="3" name="deckgen:decor"/>
           <p:cNvSpPr/>
           <p:nvPr/>
         </p:nvSpPr>
@@ -10905,7 +10905,7 @@
       </p:sp>
       <p:sp>
         <p:nvSpPr>
-          <p:cNvPr id="4" name="Oval 3"/>
+          <p:cNvPr id="4" name="deckgen:decor"/>
           <p:cNvSpPr/>
           <p:nvPr/>
         </p:nvSpPr>
@@ -12644,7 +12644,7 @@
                 <a:ea typeface="Pretendard"/>
                 <a:cs typeface="Pretendard"/>
               </a:rPr>
-              <a:t>이번 실습은 중앙값 — 가격 분포가 한쪽으로 치우쳐 평균보다 안전하고, 결측이 30건(3%)으로 적어 분산 축소 영향이 작다. 이 근거를 리포트에 적는다</a:t>
+              <a:t>이번 실습은 중앙값 — 결측 30건(2.96%)으로 적고, 이상치에 흔들리지 않는다. 이 데이터는 거의 대칭(평균 100,346 · 중앙값 101,000)이라 평균이어도 비슷</a:t>
             </a:r>
           </a:p>
         </p:txBody>
@@ -12781,7 +12781,7 @@
       <p:grpSpPr/>
       <p:sp>
         <p:nvSpPr>
-          <p:cNvPr id="2" name="Oval 1"/>
+          <p:cNvPr id="2" name="deckgen:decor"/>
           <p:cNvSpPr/>
           <p:nvPr/>
         </p:nvSpPr>
@@ -12811,7 +12811,7 @@
       </p:sp>
       <p:sp>
         <p:nvSpPr>
-          <p:cNvPr id="3" name="Oval 2"/>
+          <p:cNvPr id="3" name="deckgen:decor"/>
           <p:cNvSpPr/>
           <p:nvPr/>
         </p:nvSpPr>
@@ -12841,7 +12841,7 @@
       </p:sp>
       <p:sp>
         <p:nvSpPr>
-          <p:cNvPr id="4" name="Oval 3"/>
+          <p:cNvPr id="4" name="deckgen:decor"/>
           <p:cNvSpPr/>
           <p:nvPr/>
         </p:nvSpPr>
@@ -13919,7 +13919,7 @@
               </a:lnSpc>
             </a:pPr>
             <a:r>
-              <a:rPr sz="1875" b="1">
+              <a:rPr sz="1350" b="1">
                 <a:solidFill>
                   <a:srgbClr val="0D2B5E"/>
                 </a:solidFill>
@@ -13927,7 +13927,7 @@
                 <a:ea typeface="Pretendard"/>
                 <a:cs typeface="Pretendard"/>
               </a:rPr>
-              <a:t>중복 행이 특정 가격대에 몰려 있으면 두 중앙값이 다르다</a:t>
+              <a:t>중복이 섞인 채로 재면 중앙값이 다르다 — 오늘 데이터도 100,500 vs 101,000(실습 4단계)</a:t>
             </a:r>
           </a:p>
         </p:txBody>
@@ -14135,7 +14135,7 @@
       <p:grpSpPr/>
       <p:sp>
         <p:nvSpPr>
-          <p:cNvPr id="2" name="Oval 1"/>
+          <p:cNvPr id="2" name="deckgen:decor"/>
           <p:cNvSpPr/>
           <p:nvPr/>
         </p:nvSpPr>
@@ -14165,7 +14165,7 @@
       </p:sp>
       <p:sp>
         <p:nvSpPr>
-          <p:cNvPr id="3" name="Oval 2"/>
+          <p:cNvPr id="3" name="deckgen:decor"/>
           <p:cNvSpPr/>
           <p:nvPr/>
         </p:nvSpPr>
@@ -14195,7 +14195,7 @@
       </p:sp>
       <p:sp>
         <p:nvSpPr>
-          <p:cNvPr id="4" name="Oval 3"/>
+          <p:cNvPr id="4" name="deckgen:decor"/>
           <p:cNvSpPr/>
           <p:nvPr/>
         </p:nvSpPr>
@@ -15286,7 +15286,7 @@
       <p:grpSpPr/>
       <p:sp>
         <p:nvSpPr>
-          <p:cNvPr id="2" name="Oval 1"/>
+          <p:cNvPr id="2" name="deckgen:decor"/>
           <p:cNvSpPr/>
           <p:nvPr/>
         </p:nvSpPr>
@@ -15316,7 +15316,7 @@
       </p:sp>
       <p:sp>
         <p:nvSpPr>
-          <p:cNvPr id="3" name="Oval 2"/>
+          <p:cNvPr id="3" name="deckgen:decor"/>
           <p:cNvSpPr/>
           <p:nvPr/>
         </p:nvSpPr>
@@ -15346,7 +15346,7 @@
       </p:sp>
       <p:sp>
         <p:nvSpPr>
-          <p:cNvPr id="4" name="Oval 3"/>
+          <p:cNvPr id="4" name="deckgen:decor"/>
           <p:cNvSpPr/>
           <p:nvPr/>
         </p:nvSpPr>
@@ -15552,7 +15552,7 @@
       </p:sp>
       <p:sp>
         <p:nvSpPr>
-          <p:cNvPr id="10" name="TextBox 9"/>
+          <p:cNvPr id="10" name="deckgen:ornament"/>
           <p:cNvSpPr txBox="1"/>
           <p:nvPr/>
         </p:nvSpPr>
@@ -15737,7 +15737,7 @@
       </p:sp>
       <p:sp>
         <p:nvSpPr>
-          <p:cNvPr id="14" name="TextBox 13"/>
+          <p:cNvPr id="14" name="deckgen:ornament"/>
           <p:cNvSpPr txBox="1"/>
           <p:nvPr/>
         </p:nvSpPr>
@@ -15922,7 +15922,7 @@
       </p:sp>
       <p:sp>
         <p:nvSpPr>
-          <p:cNvPr id="18" name="TextBox 17"/>
+          <p:cNvPr id="18" name="deckgen:ornament"/>
           <p:cNvSpPr txBox="1"/>
           <p:nvPr/>
         </p:nvSpPr>
